--- a/marketing/LeXWeftLite_紹介と参加募集.pptx
+++ b/marketing/LeXWeftLite_紹介と参加募集.pptx
@@ -114,13 +114,13 @@
   <p:extLst>
     <p:ext uri="{521415D9-36F7-43E2-AB2F-B90AF26B5E84}">
       <p14:sectionLst xmlns:p14="http://schemas.microsoft.com/office/powerpoint/2010/main">
-        <p14:section name="課題" id="{43b08df3-dcfe-ff56-00a3-be2fa86a1978}">
+        <p14:section name="課題" id="{9aba28a5-5712-0eca-6a61-4d8eed5f576e}">
           <p14:sldIdLst>
             <p14:sldId id="256"/>
             <p14:sldId id="257"/>
           </p14:sldIdLst>
         </p14:section>
-        <p14:section name="解決" id="{6f0b89dc-84d2-ed7c-5a3b-28f35ad3d27a}">
+        <p14:section name="解決" id="{7016bd74-b7b1-ba92-e0b5-1308fd3fd1de}">
           <p14:sldIdLst>
             <p14:sldId id="258"/>
             <p14:sldId id="259"/>
@@ -128,7 +128,7 @@
             <p14:sldId id="261"/>
           </p14:sldIdLst>
         </p14:section>
-        <p14:section name="募集" id="{fd72778c-901f-fee1-594e-616da06da724}">
+        <p14:section name="募集" id="{62f34cc0-5ca5-7689-ac83-1204d07252bb}">
           <p14:sldIdLst>
             <p14:sldId id="262"/>
             <p14:sldId id="263"/>
